--- a/ゲーム科2年/00_前期/ゲームエンジンⅢ/バージョン管理/00_バージョン管理とは.pptx
+++ b/ゲーム科2年/00_前期/ゲームエンジンⅢ/バージョン管理/00_バージョン管理とは.pptx
@@ -260,7 +260,7 @@
           <a:p>
             <a:fld id="{E9CC885B-4903-4D54-9A93-00025F12DED9}" type="datetimeFigureOut">
               <a:rPr kumimoji="1" lang="ja-JP" altLang="en-US" smtClean="0"/>
-              <a:t>2025/1/15</a:t>
+              <a:t>2025/1/17</a:t>
             </a:fld>
             <a:endParaRPr kumimoji="1" lang="ja-JP" altLang="en-US"/>
           </a:p>
@@ -490,7 +490,7 @@
           <a:p>
             <a:fld id="{E9CC885B-4903-4D54-9A93-00025F12DED9}" type="datetimeFigureOut">
               <a:rPr kumimoji="1" lang="ja-JP" altLang="en-US" smtClean="0"/>
-              <a:t>2025/1/15</a:t>
+              <a:t>2025/1/17</a:t>
             </a:fld>
             <a:endParaRPr kumimoji="1" lang="ja-JP" altLang="en-US"/>
           </a:p>
@@ -730,7 +730,7 @@
           <a:p>
             <a:fld id="{E9CC885B-4903-4D54-9A93-00025F12DED9}" type="datetimeFigureOut">
               <a:rPr kumimoji="1" lang="ja-JP" altLang="en-US" smtClean="0"/>
-              <a:t>2025/1/15</a:t>
+              <a:t>2025/1/17</a:t>
             </a:fld>
             <a:endParaRPr kumimoji="1" lang="ja-JP" altLang="en-US"/>
           </a:p>
@@ -960,7 +960,7 @@
           <a:p>
             <a:fld id="{E9CC885B-4903-4D54-9A93-00025F12DED9}" type="datetimeFigureOut">
               <a:rPr kumimoji="1" lang="ja-JP" altLang="en-US" smtClean="0"/>
-              <a:t>2025/1/15</a:t>
+              <a:t>2025/1/17</a:t>
             </a:fld>
             <a:endParaRPr kumimoji="1" lang="ja-JP" altLang="en-US"/>
           </a:p>
@@ -1235,7 +1235,7 @@
           <a:p>
             <a:fld id="{E9CC885B-4903-4D54-9A93-00025F12DED9}" type="datetimeFigureOut">
               <a:rPr kumimoji="1" lang="ja-JP" altLang="en-US" smtClean="0"/>
-              <a:t>2025/1/15</a:t>
+              <a:t>2025/1/17</a:t>
             </a:fld>
             <a:endParaRPr kumimoji="1" lang="ja-JP" altLang="en-US"/>
           </a:p>
@@ -1564,7 +1564,7 @@
           <a:p>
             <a:fld id="{E9CC885B-4903-4D54-9A93-00025F12DED9}" type="datetimeFigureOut">
               <a:rPr kumimoji="1" lang="ja-JP" altLang="en-US" smtClean="0"/>
-              <a:t>2025/1/15</a:t>
+              <a:t>2025/1/17</a:t>
             </a:fld>
             <a:endParaRPr kumimoji="1" lang="ja-JP" altLang="en-US"/>
           </a:p>
@@ -2040,7 +2040,7 @@
           <a:p>
             <a:fld id="{E9CC885B-4903-4D54-9A93-00025F12DED9}" type="datetimeFigureOut">
               <a:rPr kumimoji="1" lang="ja-JP" altLang="en-US" smtClean="0"/>
-              <a:t>2025/1/15</a:t>
+              <a:t>2025/1/17</a:t>
             </a:fld>
             <a:endParaRPr kumimoji="1" lang="ja-JP" altLang="en-US"/>
           </a:p>
@@ -2181,7 +2181,7 @@
           <a:p>
             <a:fld id="{E9CC885B-4903-4D54-9A93-00025F12DED9}" type="datetimeFigureOut">
               <a:rPr kumimoji="1" lang="ja-JP" altLang="en-US" smtClean="0"/>
-              <a:t>2025/1/15</a:t>
+              <a:t>2025/1/17</a:t>
             </a:fld>
             <a:endParaRPr kumimoji="1" lang="ja-JP" altLang="en-US"/>
           </a:p>
@@ -2294,7 +2294,7 @@
           <a:p>
             <a:fld id="{E9CC885B-4903-4D54-9A93-00025F12DED9}" type="datetimeFigureOut">
               <a:rPr kumimoji="1" lang="ja-JP" altLang="en-US" smtClean="0"/>
-              <a:t>2025/1/15</a:t>
+              <a:t>2025/1/17</a:t>
             </a:fld>
             <a:endParaRPr kumimoji="1" lang="ja-JP" altLang="en-US"/>
           </a:p>
@@ -2637,7 +2637,7 @@
           <a:p>
             <a:fld id="{E9CC885B-4903-4D54-9A93-00025F12DED9}" type="datetimeFigureOut">
               <a:rPr kumimoji="1" lang="ja-JP" altLang="en-US" smtClean="0"/>
-              <a:t>2025/1/15</a:t>
+              <a:t>2025/1/17</a:t>
             </a:fld>
             <a:endParaRPr kumimoji="1" lang="ja-JP" altLang="en-US"/>
           </a:p>
@@ -2925,7 +2925,7 @@
           <a:p>
             <a:fld id="{E9CC885B-4903-4D54-9A93-00025F12DED9}" type="datetimeFigureOut">
               <a:rPr kumimoji="1" lang="ja-JP" altLang="en-US" smtClean="0"/>
-              <a:t>2025/1/15</a:t>
+              <a:t>2025/1/17</a:t>
             </a:fld>
             <a:endParaRPr kumimoji="1" lang="ja-JP" altLang="en-US"/>
           </a:p>
@@ -3198,7 +3198,7 @@
           <a:p>
             <a:fld id="{E9CC885B-4903-4D54-9A93-00025F12DED9}" type="datetimeFigureOut">
               <a:rPr kumimoji="1" lang="ja-JP" altLang="en-US" smtClean="0"/>
-              <a:t>2025/1/15</a:t>
+              <a:t>2025/1/17</a:t>
             </a:fld>
             <a:endParaRPr kumimoji="1" lang="ja-JP" altLang="en-US"/>
           </a:p>
@@ -3707,7 +3707,7 @@
                   <a:srgbClr val="FF0000"/>
                 </a:solidFill>
               </a:rPr>
-              <a:t>複数人でいろいろなファイルに手を入れる</a:t>
+              <a:t>複数人でいろいろなファイルを編集する</a:t>
             </a:r>
             <a:r>
               <a:rPr lang="ja-JP" altLang="en-US" sz="2400" dirty="0"/>
@@ -3848,7 +3848,7 @@
         <p:spPr>
           <a:xfrm>
             <a:off x="567542" y="1216429"/>
-            <a:ext cx="10649069" cy="3046988"/>
+            <a:ext cx="9110186" cy="3046988"/>
           </a:xfrm>
           <a:prstGeom prst="rect">
             <a:avLst/>
@@ -3880,16 +3880,9 @@
           <a:p>
             <a:r>
               <a:rPr kumimoji="1" lang="ja-JP" altLang="en-US" sz="2400" dirty="0"/>
-              <a:t>・プログラムを大幅に書き直したい時に、ある程度昔の状態にすぐ戻れる</a:t>
+              <a:t>・作業を失敗しても、セーブした状態に戻ることができる</a:t>
             </a:r>
             <a:endParaRPr kumimoji="1" lang="en-US" altLang="ja-JP" sz="2400" dirty="0"/>
-          </a:p>
-          <a:p>
-            <a:r>
-              <a:rPr lang="ja-JP" altLang="en-US" sz="2400" dirty="0"/>
-              <a:t>・チームメンバー全員で共通したファイルを修正しているように作業できる</a:t>
-            </a:r>
-            <a:endParaRPr lang="en-US" altLang="ja-JP" sz="2400" dirty="0"/>
           </a:p>
           <a:p>
             <a:r>
@@ -3897,6 +3890,13 @@
               <a:t>・だれがどこを修正したかがすぐわかる</a:t>
             </a:r>
             <a:endParaRPr kumimoji="1" lang="en-US" altLang="ja-JP" sz="2400" dirty="0"/>
+          </a:p>
+          <a:p>
+            <a:r>
+              <a:rPr lang="ja-JP" altLang="en-US" sz="2400"/>
+              <a:t>など</a:t>
+            </a:r>
+            <a:endParaRPr lang="en-US" altLang="ja-JP" sz="2400"/>
           </a:p>
           <a:p>
             <a:endParaRPr lang="en-US" altLang="ja-JP" sz="2400" dirty="0"/>
